--- a/distribution/NoQx_Launch_Plan.pptx
+++ b/distribution/NoQx_Launch_Plan.pptx
@@ -7217,7 +7217,7 @@
                             <a:srgbClr val="1E293B"/>
                           </a:solidFill>
                         </a:rPr>
-                        <a:t>50k emails / month included</a:t>
+                        <a:t>50k emails / month — covers up to ~15k DAU</a:t>
                       </a:r>
                     </a:p>
                   </a:txBody>
@@ -7752,7 +7752,7 @@
         </p:nvGraphicFramePr>
         <p:xfrm>
           <a:off x="457200" y="1280160"/>
-          <a:ext cx="11247120" cy="1975104"/>
+          <a:ext cx="11247120" cy="1645920"/>
         </p:xfrm>
         <a:graphic>
           <a:graphicData uri="http://schemas.openxmlformats.org/drawingml/2006/table">
@@ -7776,7 +7776,7 @@
                     <a:lstStyle/>
                     <a:p>
                       <a:r>
-                        <a:rPr sz="1100" b="1">
+                        <a:rPr sz="1200" b="1">
                           <a:solidFill>
                             <a:srgbClr val="FFFFFF"/>
                           </a:solidFill>
@@ -7797,7 +7797,7 @@
                     <a:lstStyle/>
                     <a:p>
                       <a:r>
-                        <a:rPr sz="1100" b="1">
+                        <a:rPr sz="1200" b="1">
                           <a:solidFill>
                             <a:srgbClr val="FFFFFF"/>
                           </a:solidFill>
@@ -7818,7 +7818,7 @@
                     <a:lstStyle/>
                     <a:p>
                       <a:r>
-                        <a:rPr sz="1100" b="1">
+                        <a:rPr sz="1200" b="1">
                           <a:solidFill>
                             <a:srgbClr val="FFFFFF"/>
                           </a:solidFill>
@@ -7839,7 +7839,7 @@
                     <a:lstStyle/>
                     <a:p>
                       <a:r>
-                        <a:rPr sz="1100" b="1">
+                        <a:rPr sz="1200" b="1">
                           <a:solidFill>
                             <a:srgbClr val="FFFFFF"/>
                           </a:solidFill>
@@ -7860,7 +7860,7 @@
                     <a:lstStyle/>
                     <a:p>
                       <a:r>
-                        <a:rPr sz="1100" b="1">
+                        <a:rPr sz="1200" b="1">
                           <a:solidFill>
                             <a:srgbClr val="FFFFFF"/>
                           </a:solidFill>
@@ -7881,7 +7881,7 @@
                     <a:lstStyle/>
                     <a:p>
                       <a:r>
-                        <a:rPr sz="1100" b="1">
+                        <a:rPr sz="1200" b="1">
                           <a:solidFill>
                             <a:srgbClr val="FFFFFF"/>
                           </a:solidFill>
@@ -7902,7 +7902,7 @@
                     <a:lstStyle/>
                     <a:p>
                       <a:r>
-                        <a:rPr sz="1100" b="1">
+                        <a:rPr sz="1200" b="1">
                           <a:solidFill>
                             <a:srgbClr val="FFFFFF"/>
                           </a:solidFill>
@@ -7925,7 +7925,7 @@
                     <a:lstStyle/>
                     <a:p>
                       <a:r>
-                        <a:rPr sz="1100">
+                        <a:rPr sz="1200">
                           <a:solidFill>
                             <a:srgbClr val="1E293B"/>
                           </a:solidFill>
@@ -7946,7 +7946,7 @@
                     <a:lstStyle/>
                     <a:p>
                       <a:r>
-                        <a:rPr sz="1100">
+                        <a:rPr sz="1200">
                           <a:solidFill>
                             <a:srgbClr val="1E293B"/>
                           </a:solidFill>
@@ -7967,7 +7967,7 @@
                     <a:lstStyle/>
                     <a:p>
                       <a:r>
-                        <a:rPr sz="1100">
+                        <a:rPr sz="1200">
                           <a:solidFill>
                             <a:srgbClr val="1E293B"/>
                           </a:solidFill>
@@ -7988,12 +7988,12 @@
                     <a:lstStyle/>
                     <a:p>
                       <a:r>
-                        <a:rPr sz="1100">
+                        <a:rPr sz="1200">
                           <a:solidFill>
                             <a:srgbClr val="1E293B"/>
                           </a:solidFill>
                         </a:rPr>
-                        <a:t>$20</a:t>
+                        <a:t>$0 (Free)</a:t>
                       </a:r>
                     </a:p>
                   </a:txBody>
@@ -8009,7 +8009,7 @@
                     <a:lstStyle/>
                     <a:p>
                       <a:r>
-                        <a:rPr sz="1100">
+                        <a:rPr sz="1200">
                           <a:solidFill>
                             <a:srgbClr val="1E293B"/>
                           </a:solidFill>
@@ -8030,7 +8030,7 @@
                     <a:lstStyle/>
                     <a:p>
                       <a:r>
-                        <a:rPr sz="1100">
+                        <a:rPr sz="1200">
                           <a:solidFill>
                             <a:srgbClr val="1E293B"/>
                           </a:solidFill>
@@ -8051,12 +8051,12 @@
                     <a:lstStyle/>
                     <a:p>
                       <a:r>
-                        <a:rPr sz="1100">
+                        <a:rPr sz="1200">
                           <a:solidFill>
                             <a:srgbClr val="1E293B"/>
                           </a:solidFill>
                         </a:rPr>
-                        <a:t>$70/mo</a:t>
+                        <a:t>$50/mo</a:t>
                       </a:r>
                     </a:p>
                   </a:txBody>
@@ -8074,7 +8074,7 @@
                     <a:lstStyle/>
                     <a:p>
                       <a:r>
-                        <a:rPr sz="1100">
+                        <a:rPr sz="1200">
                           <a:solidFill>
                             <a:srgbClr val="1E293B"/>
                           </a:solidFill>
@@ -8095,7 +8095,7 @@
                     <a:lstStyle/>
                     <a:p>
                       <a:r>
-                        <a:rPr sz="1100">
+                        <a:rPr sz="1200">
                           <a:solidFill>
                             <a:srgbClr val="1E293B"/>
                           </a:solidFill>
@@ -8116,7 +8116,7 @@
                     <a:lstStyle/>
                     <a:p>
                       <a:r>
-                        <a:rPr sz="1100">
+                        <a:rPr sz="1200">
                           <a:solidFill>
                             <a:srgbClr val="1E293B"/>
                           </a:solidFill>
@@ -8137,12 +8137,12 @@
                     <a:lstStyle/>
                     <a:p>
                       <a:r>
-                        <a:rPr sz="1100">
+                        <a:rPr sz="1200">
                           <a:solidFill>
                             <a:srgbClr val="1E293B"/>
                           </a:solidFill>
                         </a:rPr>
-                        <a:t>$99</a:t>
+                        <a:t>$20</a:t>
                       </a:r>
                     </a:p>
                   </a:txBody>
@@ -8158,7 +8158,7 @@
                     <a:lstStyle/>
                     <a:p>
                       <a:r>
-                        <a:rPr sz="1100">
+                        <a:rPr sz="1200">
                           <a:solidFill>
                             <a:srgbClr val="1E293B"/>
                           </a:solidFill>
@@ -8179,7 +8179,7 @@
                     <a:lstStyle/>
                     <a:p>
                       <a:r>
-                        <a:rPr sz="1100">
+                        <a:rPr sz="1200">
                           <a:solidFill>
                             <a:srgbClr val="1E293B"/>
                           </a:solidFill>
@@ -8200,12 +8200,12 @@
                     <a:lstStyle/>
                     <a:p>
                       <a:r>
-                        <a:rPr sz="1100">
+                        <a:rPr sz="1200">
                           <a:solidFill>
                             <a:srgbClr val="1E293B"/>
                           </a:solidFill>
                         </a:rPr>
-                        <a:t>$200/mo</a:t>
+                        <a:t>$125/mo</a:t>
                       </a:r>
                     </a:p>
                   </a:txBody>
@@ -8223,7 +8223,7 @@
                     <a:lstStyle/>
                     <a:p>
                       <a:r>
-                        <a:rPr sz="1100" b="1">
+                        <a:rPr sz="1200" b="1">
                           <a:solidFill>
                             <a:srgbClr val="7C3AED"/>
                           </a:solidFill>
@@ -8244,7 +8244,7 @@
                     <a:lstStyle/>
                     <a:p>
                       <a:r>
-                        <a:rPr sz="1100" b="1">
+                        <a:rPr sz="1200" b="1">
                           <a:solidFill>
                             <a:srgbClr val="7C3AED"/>
                           </a:solidFill>
@@ -8265,7 +8265,7 @@
                     <a:lstStyle/>
                     <a:p>
                       <a:r>
-                        <a:rPr sz="1100" b="1">
+                        <a:rPr sz="1200" b="1">
                           <a:solidFill>
                             <a:srgbClr val="7C3AED"/>
                           </a:solidFill>
@@ -8286,12 +8286,12 @@
                     <a:lstStyle/>
                     <a:p>
                       <a:r>
-                        <a:rPr sz="1100" b="1">
+                        <a:rPr sz="1200" b="1">
                           <a:solidFill>
                             <a:srgbClr val="7C3AED"/>
                           </a:solidFill>
                         </a:rPr>
-                        <a:t>$399</a:t>
+                        <a:t>$20</a:t>
                       </a:r>
                     </a:p>
                   </a:txBody>
@@ -8307,7 +8307,7 @@
                     <a:lstStyle/>
                     <a:p>
                       <a:r>
-                        <a:rPr sz="1100" b="1">
+                        <a:rPr sz="1200" b="1">
                           <a:solidFill>
                             <a:srgbClr val="7C3AED"/>
                           </a:solidFill>
@@ -8328,7 +8328,7 @@
                     <a:lstStyle/>
                     <a:p>
                       <a:r>
-                        <a:rPr sz="1100" b="1">
+                        <a:rPr sz="1200" b="1">
                           <a:solidFill>
                             <a:srgbClr val="7C3AED"/>
                           </a:solidFill>
@@ -8349,12 +8349,12 @@
                     <a:lstStyle/>
                     <a:p>
                       <a:r>
-                        <a:rPr sz="1100" b="1">
+                        <a:rPr sz="1200" b="1">
                           <a:solidFill>
                             <a:srgbClr val="7C3AED"/>
                           </a:solidFill>
                         </a:rPr>
-                        <a:t>$630/mo</a:t>
+                        <a:t>$255/mo</a:t>
                       </a:r>
                     </a:p>
                   </a:txBody>
@@ -8372,12 +8372,12 @@
                     <a:lstStyle/>
                     <a:p>
                       <a:r>
-                        <a:rPr sz="1100">
+                        <a:rPr sz="1200">
                           <a:solidFill>
                             <a:srgbClr val="1E293B"/>
                           </a:solidFill>
                         </a:rPr>
-                        <a:t>15k w/ FCM push</a:t>
+                        <a:t>50,000 DAU</a:t>
                       </a:r>
                     </a:p>
                   </a:txBody>
@@ -8393,12 +8393,12 @@
                     <a:lstStyle/>
                     <a:p>
                       <a:r>
-                        <a:rPr sz="1100">
+                        <a:rPr sz="1200">
                           <a:solidFill>
                             <a:srgbClr val="1E293B"/>
                           </a:solidFill>
                         </a:rPr>
-                        <a:t>$100</a:t>
+                        <a:t>$300</a:t>
                       </a:r>
                     </a:p>
                   </a:txBody>
@@ -8414,12 +8414,12 @@
                     <a:lstStyle/>
                     <a:p>
                       <a:r>
-                        <a:rPr sz="1100">
+                        <a:rPr sz="1200">
                           <a:solidFill>
                             <a:srgbClr val="1E293B"/>
                           </a:solidFill>
                         </a:rPr>
-                        <a:t>$85</a:t>
+                        <a:t>$135</a:t>
                       </a:r>
                     </a:p>
                   </a:txBody>
@@ -8435,7 +8435,7 @@
                     <a:lstStyle/>
                     <a:p>
                       <a:r>
-                        <a:rPr sz="1100">
+                        <a:rPr sz="1200">
                           <a:solidFill>
                             <a:srgbClr val="1E293B"/>
                           </a:solidFill>
@@ -8456,12 +8456,12 @@
                     <a:lstStyle/>
                     <a:p>
                       <a:r>
-                        <a:rPr sz="1100">
+                        <a:rPr sz="1200">
                           <a:solidFill>
                             <a:srgbClr val="1E293B"/>
                           </a:solidFill>
                         </a:rPr>
-                        <a:t>$0</a:t>
+                        <a:t>$20</a:t>
                       </a:r>
                     </a:p>
                   </a:txBody>
@@ -8477,12 +8477,12 @@
                     <a:lstStyle/>
                     <a:p>
                       <a:r>
-                        <a:rPr sz="1100">
+                        <a:rPr sz="1200">
                           <a:solidFill>
                             <a:srgbClr val="1E293B"/>
                           </a:solidFill>
                         </a:rPr>
-                        <a:t>$50</a:t>
+                        <a:t>$150</a:t>
                       </a:r>
                     </a:p>
                   </a:txBody>
@@ -8498,167 +8498,18 @@
                     <a:lstStyle/>
                     <a:p>
                       <a:r>
-                        <a:rPr sz="1100">
+                        <a:rPr sz="1200">
                           <a:solidFill>
                             <a:srgbClr val="1E293B"/>
                           </a:solidFill>
                         </a:rPr>
-                        <a:t>$330/mo</a:t>
+                        <a:t>$704/mo</a:t>
                       </a:r>
                     </a:p>
                   </a:txBody>
                   <a:tcPr>
                     <a:solidFill>
                       <a:srgbClr val="F5F3FF"/>
-                    </a:solidFill>
-                  </a:tcPr>
-                </a:tc>
-              </a:tr>
-              <a:tr h="329184">
-                <a:tc>
-                  <a:txBody>
-                    <a:bodyPr lIns="73152" rIns="45720" tIns="36576" bIns="36576"/>
-                    <a:lstStyle/>
-                    <a:p>
-                      <a:r>
-                        <a:rPr sz="1100">
-                          <a:solidFill>
-                            <a:srgbClr val="1E293B"/>
-                          </a:solidFill>
-                        </a:rPr>
-                        <a:t>50,000 DAU</a:t>
-                      </a:r>
-                    </a:p>
-                  </a:txBody>
-                  <a:tcPr>
-                    <a:solidFill>
-                      <a:srgbClr val="FFFFFF"/>
-                    </a:solidFill>
-                  </a:tcPr>
-                </a:tc>
-                <a:tc>
-                  <a:txBody>
-                    <a:bodyPr lIns="73152" rIns="45720" tIns="36576" bIns="36576"/>
-                    <a:lstStyle/>
-                    <a:p>
-                      <a:r>
-                        <a:rPr sz="1100">
-                          <a:solidFill>
-                            <a:srgbClr val="1E293B"/>
-                          </a:solidFill>
-                        </a:rPr>
-                        <a:t>$300</a:t>
-                      </a:r>
-                    </a:p>
-                  </a:txBody>
-                  <a:tcPr>
-                    <a:solidFill>
-                      <a:srgbClr val="FFFFFF"/>
-                    </a:solidFill>
-                  </a:tcPr>
-                </a:tc>
-                <a:tc>
-                  <a:txBody>
-                    <a:bodyPr lIns="73152" rIns="45720" tIns="36576" bIns="36576"/>
-                    <a:lstStyle/>
-                    <a:p>
-                      <a:r>
-                        <a:rPr sz="1100">
-                          <a:solidFill>
-                            <a:srgbClr val="1E293B"/>
-                          </a:solidFill>
-                        </a:rPr>
-                        <a:t>$135</a:t>
-                      </a:r>
-                    </a:p>
-                  </a:txBody>
-                  <a:tcPr>
-                    <a:solidFill>
-                      <a:srgbClr val="FFFFFF"/>
-                    </a:solidFill>
-                  </a:tcPr>
-                </a:tc>
-                <a:tc>
-                  <a:txBody>
-                    <a:bodyPr lIns="73152" rIns="45720" tIns="36576" bIns="36576"/>
-                    <a:lstStyle/>
-                    <a:p>
-                      <a:r>
-                        <a:rPr sz="1100">
-                          <a:solidFill>
-                            <a:srgbClr val="1E293B"/>
-                          </a:solidFill>
-                        </a:rPr>
-                        <a:t>Enterprise</a:t>
-                      </a:r>
-                    </a:p>
-                  </a:txBody>
-                  <a:tcPr>
-                    <a:solidFill>
-                      <a:srgbClr val="FFFFFF"/>
-                    </a:solidFill>
-                  </a:tcPr>
-                </a:tc>
-                <a:tc>
-                  <a:txBody>
-                    <a:bodyPr lIns="73152" rIns="45720" tIns="36576" bIns="36576"/>
-                    <a:lstStyle/>
-                    <a:p>
-                      <a:r>
-                        <a:rPr sz="1100">
-                          <a:solidFill>
-                            <a:srgbClr val="1E293B"/>
-                          </a:solidFill>
-                        </a:rPr>
-                        <a:t>$20</a:t>
-                      </a:r>
-                    </a:p>
-                  </a:txBody>
-                  <a:tcPr>
-                    <a:solidFill>
-                      <a:srgbClr val="FFFFFF"/>
-                    </a:solidFill>
-                  </a:tcPr>
-                </a:tc>
-                <a:tc>
-                  <a:txBody>
-                    <a:bodyPr lIns="73152" rIns="45720" tIns="36576" bIns="36576"/>
-                    <a:lstStyle/>
-                    <a:p>
-                      <a:r>
-                        <a:rPr sz="1100">
-                          <a:solidFill>
-                            <a:srgbClr val="1E293B"/>
-                          </a:solidFill>
-                        </a:rPr>
-                        <a:t>$150</a:t>
-                      </a:r>
-                    </a:p>
-                  </a:txBody>
-                  <a:tcPr>
-                    <a:solidFill>
-                      <a:srgbClr val="FFFFFF"/>
-                    </a:solidFill>
-                  </a:tcPr>
-                </a:tc>
-                <a:tc>
-                  <a:txBody>
-                    <a:bodyPr lIns="73152" rIns="45720" tIns="36576" bIns="36576"/>
-                    <a:lstStyle/>
-                    <a:p>
-                      <a:r>
-                        <a:rPr sz="1100">
-                          <a:solidFill>
-                            <a:srgbClr val="1E293B"/>
-                          </a:solidFill>
-                        </a:rPr>
-                        <a:t>$1,000+/mo</a:t>
-                      </a:r>
-                    </a:p>
-                  </a:txBody>
-                  <a:tcPr>
-                    <a:solidFill>
-                      <a:srgbClr val="FFFFFF"/>
                     </a:solidFill>
                   </a:tcPr>
                 </a:tc>
@@ -8675,7 +8526,7 @@
         </p:nvSpPr>
         <p:spPr>
           <a:xfrm>
-            <a:off x="457200" y="4389120"/>
+            <a:off x="457200" y="4023360"/>
             <a:ext cx="11247120" cy="457200"/>
           </a:xfrm>
           <a:prstGeom prst="rect">
@@ -8697,7 +8548,7 @@
                 </a:solidFill>
                 <a:latin typeface="Calibri"/>
               </a:rPr>
-              <a:t>At 15k DAU: re-enable push notifications (FCM, currently disabled) to drop email volume by ~70% → saves ~$300/mo.</a:t>
+              <a:t>Resend numbers are MUCH lower than first-pass estimates. We only send email for sign-up OTP + password reset</a:t>
             </a:r>
           </a:p>
         </p:txBody>
@@ -8710,7 +8561,7 @@
         </p:nvSpPr>
         <p:spPr>
           <a:xfrm>
-            <a:off x="457200" y="4937760"/>
+            <a:off x="457200" y="4434840"/>
             <a:ext cx="11247120" cy="457200"/>
           </a:xfrm>
           <a:prstGeom prst="rect">
@@ -8732,6 +8583,41 @@
                 </a:solidFill>
                 <a:latin typeface="Calibri"/>
               </a:rPr>
+              <a:t>(not order status — that uses in-app bell + FCM push). Realistic volume is ~6% of DAU/day = well within Pro tier.</a:t>
+            </a:r>
+          </a:p>
+        </p:txBody>
+      </p:sp>
+      <p:sp>
+        <p:nvSpPr>
+          <p:cNvPr id="10" name="TextBox 9"/>
+          <p:cNvSpPr txBox="1"/>
+          <p:nvPr/>
+        </p:nvSpPr>
+        <p:spPr>
+          <a:xfrm>
+            <a:off x="457200" y="5029200"/>
+            <a:ext cx="11247120" cy="457200"/>
+          </a:xfrm>
+          <a:prstGeom prst="rect">
+            <a:avLst/>
+          </a:prstGeom>
+          <a:noFill/>
+        </p:spPr>
+        <p:txBody>
+          <a:bodyPr wrap="square" lIns="0" rIns="0" tIns="0" bIns="0">
+            <a:spAutoFit/>
+          </a:bodyPr>
+          <a:lstStyle/>
+          <a:p>
+            <a:pPr algn="l"/>
+            <a:r>
+              <a:rPr sz="1200" b="0">
+                <a:solidFill>
+                  <a:srgbClr val="1E293B"/>
+                </a:solidFill>
+                <a:latin typeface="Calibri"/>
+              </a:rPr>
               <a:t>PLUS Razorpay 2% fee on every order. At 15k DAU × ₹80 avg order × 30 days = ₹36L gross/mo → ₹72k Razorpay fee.</a:t>
             </a:r>
           </a:p>
@@ -8739,7 +8625,7 @@
       </p:sp>
       <p:sp>
         <p:nvSpPr>
-          <p:cNvPr id="10" name="TextBox 9"/>
+          <p:cNvPr id="11" name="TextBox 10"/>
           <p:cNvSpPr txBox="1"/>
           <p:nvPr/>
         </p:nvSpPr>
@@ -8767,14 +8653,14 @@
                 </a:solidFill>
                 <a:latin typeface="Calibri"/>
               </a:rPr>
-              <a:t>All services are usage-based: you don't pay for capacity you don't use. Scale up only as you cross thresholds.</a:t>
-            </a:r>
-          </a:p>
-        </p:txBody>
-      </p:sp>
-      <p:sp>
-        <p:nvSpPr>
-          <p:cNvPr id="11" name="TextBox 10"/>
+              <a:t>All services are usage-based: you only pay for what you use. Scale up only as you cross thresholds.</a:t>
+            </a:r>
+          </a:p>
+        </p:txBody>
+      </p:sp>
+      <p:sp>
+        <p:nvSpPr>
+          <p:cNvPr id="12" name="TextBox 11"/>
           <p:cNvSpPr txBox="1"/>
           <p:nvPr/>
         </p:nvSpPr>
@@ -8809,7 +8695,7 @@
       </p:sp>
       <p:sp>
         <p:nvSpPr>
-          <p:cNvPr id="12" name="TextBox 11"/>
+          <p:cNvPr id="13" name="TextBox 12"/>
           <p:cNvSpPr txBox="1"/>
           <p:nvPr/>
         </p:nvSpPr>
